--- a/assets/pptx/catalog-765.pptx
+++ b/assets/pptx/catalog-765.pptx
@@ -3565,7 +3565,7 @@
                 <a:ea typeface="Ebrima"/>
                 <a:cs typeface="Ebrima"/>
               </a:rPr>
-              <a:t>(3x) ታርደሃልና ትፈታ ዘንድ ይገባሃል</a:t>
+              <a:t>3x ታርደሃልና ትፈታ ዘንድ ይገባሃል</a:t>
             </a:r>
           </a:p>
           <a:p>
@@ -3619,7 +3619,7 @@
                 <a:ea typeface="Ebrima"/>
                 <a:cs typeface="Ebrima"/>
               </a:rPr>
-              <a:t>ይቀበል ዘንድ ይገባዋል (2x) በረከትን ይቀበል ዘንድ ይገባዋል</a:t>
+              <a:t>ይቀበል ዘንድ ይገባዋል 2x በረከትን ይቀበል ዘንድ ይገባዋል</a:t>
             </a:r>
           </a:p>
           <a:p>
